--- a/diagram/Отчет_UML-диаграммы.pptx
+++ b/diagram/Отчет_UML-диаграммы.pptx
@@ -1741,15 +1741,13 @@
               <a:buNone/>
             </a:pPr>
             <a:r>
-              <a:rPr lang="en-US" sz="1400" dirty="0">
+              <a:rPr lang="ru-RU" sz="1400" dirty="0">
                 <a:solidFill>
                   <a:srgbClr val="9FB3C6"/>
                 </a:solidFill>
-                <a:latin typeface="Inter" pitchFamily="34" charset="0"/>
-                <a:ea typeface="Inter" pitchFamily="34" charset="-122"/>
-                <a:cs typeface="Inter" pitchFamily="34" charset="-120"/>
+                <a:ea typeface="Inter" pitchFamily="34" charset="-122"/>
               </a:rPr>
-              <a:t>[ФИО, группа, дата]</a:t>
+              <a:t>Болотов К.А. ИВТ-4</a:t>
             </a:r>
             <a:endParaRPr lang="en-US" sz="1400" dirty="0"/>
           </a:p>
@@ -2104,7 +2102,29 @@
                 <a:ea typeface="Inter" pitchFamily="34" charset="-122"/>
                 <a:cs typeface="Inter" pitchFamily="34" charset="-120"/>
               </a:rPr>
-              <a:t>Опыт и уровни, прокачка характеристик, боссы, награды, достижения. PvP нет.</a:t>
+              <a:t>Опыт и уровни, прокачка характеристик, боссы, награды, </a:t>
+            </a:r>
+            <a:r>
+              <a:rPr lang="en-US" sz="1400" dirty="0" err="1">
+                <a:solidFill>
+                  <a:srgbClr val="4A5560"/>
+                </a:solidFill>
+                <a:latin typeface="Inter" pitchFamily="34" charset="0"/>
+                <a:ea typeface="Inter" pitchFamily="34" charset="-122"/>
+                <a:cs typeface="Inter" pitchFamily="34" charset="-120"/>
+              </a:rPr>
+              <a:t>достижения</a:t>
+            </a:r>
+            <a:r>
+              <a:rPr lang="en-US" sz="1400" dirty="0">
+                <a:solidFill>
+                  <a:srgbClr val="4A5560"/>
+                </a:solidFill>
+                <a:latin typeface="Inter" pitchFamily="34" charset="0"/>
+                <a:ea typeface="Inter" pitchFamily="34" charset="-122"/>
+                <a:cs typeface="Inter" pitchFamily="34" charset="-120"/>
+              </a:rPr>
+              <a:t>.</a:t>
             </a:r>
             <a:endParaRPr lang="en-US" sz="1400" dirty="0"/>
           </a:p>
